--- a/ai-case-library/research/ventures/grid-vision2-deck.pptx
+++ b/ai-case-library/research/ventures/grid-vision2-deck.pptx
@@ -2554,7 +2554,7 @@
       </p:sp>
       <p:pic>
         <p:nvPicPr>
-          <p:cNvPr id="7" name="Image 0" descr="/tmp/claude-0/-home-user/5ac64fc3-708b-5ba2-8575-a96a48f05f03/scratchpad/product/map.png">    </p:cNvPr>
+          <p:cNvPr id="7" name="Image 0" descr="_product/map.png">    </p:cNvPr>
           <p:cNvPicPr>
             <a:picLocks noChangeAspect="1"/>
           </p:cNvPicPr>
@@ -5998,7 +5998,7 @@
                 <a:ea typeface="Arial" pitchFamily="34" charset="-122"/>
                 <a:cs typeface="Arial" pitchFamily="34" charset="-120"/>
               </a:rPr>
-              <a:t>Этап 2 (следующий раунд, ориентир 20–30 млн $): инженерные фирмы с моделью внутри — партнёрство или покупка, чтобы забирать не долю гонорара, а весь. За такие фирмы стратеги платят по 445 тыс. $ за инженера (WSP → POWER). Модель остаётся ядром, фирмы — её руками.</a:t>
+              <a:t>Этап 2 (следующий раунд, ориентир 20–30 млн $): инженерные фирмы с моделью внутри — партнёрство или покупка, чтобы забирать не долю гонорара, а весь. Малые фирмы стоят 5–7 годовых прибылей; 445 тыс. $ за инженера (WSP → POWER) платят за масштаб, не за ИИ. Модель остаётся ядром, фирмы — её руками.</a:t>
             </a:r>
             <a:endParaRPr lang="en-US" sz="1300" dirty="0"/>
           </a:p>
@@ -6455,6 +6455,27 @@
                 <a:cs typeface="Arial" pitchFamily="34" charset="-120"/>
               </a:rPr>
               <a:t>48 проектов, 32 клиента, 64 сотрудника, 14 исследователей, 59% — корпоративная презентация Океан Тех (2026). Цены и сроки прототипа — допущения.</a:t>
+            </a:r>
+            <a:endParaRPr lang="en-US" sz="1150" dirty="0"/>
+          </a:p>
+          <a:p>
+            <a:pPr marL="342900" indent="-342900">
+              <a:spcAft>
+                <a:spcPts val="600"/>
+              </a:spcAft>
+              <a:buSzPct val="100000"/>
+              <a:buChar char="•"/>
+            </a:pPr>
+            <a:r>
+              <a:rPr lang="en-US" sz="1150" dirty="0">
+                <a:solidFill>
+                  <a:srgbClr val="5C6067"/>
+                </a:solidFill>
+                <a:latin typeface="Arial" pitchFamily="34" charset="0"/>
+                <a:ea typeface="Arial" pitchFamily="34" charset="-122"/>
+                <a:cs typeface="Arial" pitchFamily="34" charset="-120"/>
+              </a:rPr>
+              <a:t>5–7 годовых прибылей за малую фирму — ROG Partners (медиана 5,4–5,5×, верхний квартиль 7,5× EBITDA); 445 тыс. $ — за группу на 4000 человек. Паспорт роллапа: engineering-rollup-passport.md.</a:t>
             </a:r>
             <a:endParaRPr lang="en-US" sz="1150" dirty="0"/>
           </a:p>
